--- a/review_deck/ShiftGuard_Review2.pptx
+++ b/review_deck/ShiftGuard_Review2.pptx
@@ -6428,7 +6428,7 @@
       </p:sp>
       <p:pic>
         <p:nvPicPr>
-          <p:cNvPr id="9" name="Twin screenshot" descr="live_bridge_damage.png"/>
+          <p:cNvPr id="9" name="Twin screenshot" descr="4_damage_cropped.png"/>
           <p:cNvPicPr>
             <a:picLocks noChangeAspect="1"/>
           </p:cNvPicPr>
